--- a/RepoScope — Pitch Deck v3.0.pptx
+++ b/RepoScope — Pitch Deck v3.0.pptx
@@ -2343,7 +2343,7 @@
       </p:sp>
       <p:pic>
         <p:nvPicPr>
-          <p:cNvPr id="3" name="Image 0" descr="/tmp/h2p-svg-1790773506848-yv9w4o.png">    </p:cNvPr>
+          <p:cNvPr id="3" name="Image 0" descr="/tmp/h2p-svg-1790971020314-tla9dq.png">    </p:cNvPr>
           <p:cNvPicPr>
             <a:picLocks noChangeAspect="1"/>
           </p:cNvPicPr>
@@ -4329,7 +4329,7 @@
       </p:sp>
       <p:pic>
         <p:nvPicPr>
-          <p:cNvPr id="40" name="Image 0" descr="/tmp/h2p-svg-1790773508142-2traje.png">    </p:cNvPr>
+          <p:cNvPr id="40" name="Image 0" descr="/tmp/h2p-svg-1790971021631-ew88rz.png">    </p:cNvPr>
           <p:cNvPicPr>
             <a:picLocks noChangeAspect="1"/>
           </p:cNvPicPr>
@@ -8911,7 +8911,7 @@
       </p:sp>
       <p:pic>
         <p:nvPicPr>
-          <p:cNvPr id="25" name="Image 0" descr="/tmp/h2p-svg-1790773508164-soagqf.png">    </p:cNvPr>
+          <p:cNvPr id="25" name="Image 0" descr="/tmp/h2p-svg-1790971021639-bxoa03.png">    </p:cNvPr>
           <p:cNvPicPr>
             <a:picLocks noChangeAspect="1"/>
           </p:cNvPicPr>
@@ -11095,7 +11095,7 @@
       </p:sp>
       <p:pic>
         <p:nvPicPr>
-          <p:cNvPr id="31" name="Image 0" descr="/tmp/h2p-svg-1790773508788-uvtlkk.png">    </p:cNvPr>
+          <p:cNvPr id="31" name="Image 0" descr="/tmp/h2p-svg-1790971022273-3lpf0a.png">    </p:cNvPr>
           <p:cNvPicPr>
             <a:picLocks noChangeAspect="1"/>
           </p:cNvPicPr>
@@ -11239,7 +11239,7 @@
       </p:sp>
       <p:pic>
         <p:nvPicPr>
-          <p:cNvPr id="35" name="Image 1" descr="/tmp/h2p-svg-1790773508788-i0xy4f.png">    </p:cNvPr>
+          <p:cNvPr id="35" name="Image 1" descr="/tmp/h2p-svg-1790971022273-8hlb6q.png">    </p:cNvPr>
           <p:cNvPicPr>
             <a:picLocks noChangeAspect="1"/>
           </p:cNvPicPr>
@@ -11383,7 +11383,7 @@
       </p:sp>
       <p:pic>
         <p:nvPicPr>
-          <p:cNvPr id="39" name="Image 2" descr="/tmp/h2p-svg-1790773508788-db0dl5.png">    </p:cNvPr>
+          <p:cNvPr id="39" name="Image 2" descr="/tmp/h2p-svg-1790971022273-0w0zud.png">    </p:cNvPr>
           <p:cNvPicPr>
             <a:picLocks noChangeAspect="1"/>
           </p:cNvPicPr>
@@ -11527,7 +11527,7 @@
       </p:sp>
       <p:pic>
         <p:nvPicPr>
-          <p:cNvPr id="43" name="Image 3" descr="/tmp/h2p-svg-1790773508788-csmz8b.png">    </p:cNvPr>
+          <p:cNvPr id="43" name="Image 3" descr="/tmp/h2p-svg-1790971022273-urxivb.png">    </p:cNvPr>
           <p:cNvPicPr>
             <a:picLocks noChangeAspect="1"/>
           </p:cNvPicPr>
@@ -16754,7 +16754,7 @@
       </p:sp>
       <p:pic>
         <p:nvPicPr>
-          <p:cNvPr id="5" name="Image 0" descr="/tmp/h2p-svg-1790773508769-vx046f.png">    </p:cNvPr>
+          <p:cNvPr id="5" name="Image 0" descr="/tmp/h2p-svg-1790971022257-d3xw4i.png">    </p:cNvPr>
           <p:cNvPicPr>
             <a:picLocks noChangeAspect="1"/>
           </p:cNvPicPr>
@@ -17706,7 +17706,7 @@
       </p:sp>
       <p:pic>
         <p:nvPicPr>
-          <p:cNvPr id="3" name="Image 0" descr="/tmp/h2p-svg-1790773509363-7ff04m.png">    </p:cNvPr>
+          <p:cNvPr id="3" name="Image 0" descr="/tmp/h2p-svg-1790971022835-lpp2ol.png">    </p:cNvPr>
           <p:cNvPicPr>
             <a:picLocks noChangeAspect="1"/>
           </p:cNvPicPr>
@@ -18282,7 +18282,7 @@
       </p:sp>
       <p:pic>
         <p:nvPicPr>
-          <p:cNvPr id="17" name="Image 1" descr="/tmp/h2p-svg-1790773509363-9t0jn9.png">    </p:cNvPr>
+          <p:cNvPr id="17" name="Image 1" descr="/tmp/h2p-svg-1790971022835-3me3o0.png">    </p:cNvPr>
           <p:cNvPicPr>
             <a:picLocks noChangeAspect="1"/>
           </p:cNvPicPr>
@@ -18426,7 +18426,7 @@
       </p:sp>
       <p:pic>
         <p:nvPicPr>
-          <p:cNvPr id="21" name="Image 2" descr="/tmp/h2p-svg-1790773509363-71y0g8.png">    </p:cNvPr>
+          <p:cNvPr id="21" name="Image 2" descr="/tmp/h2p-svg-1790971022835-lsj3sg.png">    </p:cNvPr>
           <p:cNvPicPr>
             <a:picLocks noChangeAspect="1"/>
           </p:cNvPicPr>
@@ -18570,7 +18570,7 @@
       </p:sp>
       <p:pic>
         <p:nvPicPr>
-          <p:cNvPr id="25" name="Image 3" descr="/tmp/h2p-svg-1790773509363-6i432w.png">    </p:cNvPr>
+          <p:cNvPr id="25" name="Image 3" descr="/tmp/h2p-svg-1790971022835-bkyxgl.png">    </p:cNvPr>
           <p:cNvPicPr>
             <a:picLocks noChangeAspect="1"/>
           </p:cNvPicPr>
@@ -18664,7 +18664,7 @@
                 <a:ea typeface="Liberation Sans Narrow" pitchFamily="34" charset="-122"/>
                 <a:cs typeface="Liberation Sans Narrow" pitchFamily="34" charset="-120"/>
               </a:rPr>
-              <a:t>youtu.be/W82roIETJJ8</a:t>
+              <a:t>youtu.be/h1Fh6I6Yxac</a:t>
             </a:r>
             <a:endParaRPr lang="en-US" sz="800" dirty="0"/>
           </a:p>
@@ -20395,7 +20395,7 @@
       </p:sp>
       <p:pic>
         <p:nvPicPr>
-          <p:cNvPr id="5" name="Image 0" descr="/tmp/h2p-svg-1790773506863-82vzye.png">    </p:cNvPr>
+          <p:cNvPr id="5" name="Image 0" descr="/tmp/h2p-svg-1790971020326-7bici2.png">    </p:cNvPr>
           <p:cNvPicPr>
             <a:picLocks noChangeAspect="1"/>
           </p:cNvPicPr>
@@ -20567,7 +20567,7 @@
       </p:sp>
       <p:pic>
         <p:nvPicPr>
-          <p:cNvPr id="10" name="Image 1" descr="/tmp/h2p-svg-1790773506863-1yhola.png">    </p:cNvPr>
+          <p:cNvPr id="10" name="Image 1" descr="/tmp/h2p-svg-1790971020327-88viiu.png">    </p:cNvPr>
           <p:cNvPicPr>
             <a:picLocks noChangeAspect="1"/>
           </p:cNvPicPr>
@@ -20777,7 +20777,7 @@
       </p:sp>
       <p:pic>
         <p:nvPicPr>
-          <p:cNvPr id="16" name="Image 2" descr="/tmp/h2p-svg-1790773506863-uvmmoo.png">    </p:cNvPr>
+          <p:cNvPr id="16" name="Image 2" descr="/tmp/h2p-svg-1790971020327-3but0k.png">    </p:cNvPr>
           <p:cNvPicPr>
             <a:picLocks noChangeAspect="1"/>
           </p:cNvPicPr>
@@ -20949,7 +20949,7 @@
       </p:sp>
       <p:pic>
         <p:nvPicPr>
-          <p:cNvPr id="21" name="Image 3" descr="/tmp/h2p-svg-1790773506864-ivht3k.png">    </p:cNvPr>
+          <p:cNvPr id="21" name="Image 3" descr="/tmp/h2p-svg-1790971020327-hakqi7.png">    </p:cNvPr>
           <p:cNvPicPr>
             <a:picLocks noChangeAspect="1"/>
           </p:cNvPicPr>
@@ -22860,7 +22860,7 @@
       </p:sp>
       <p:pic>
         <p:nvPicPr>
-          <p:cNvPr id="7" name="Image 0" descr="/tmp/h2p-svg-1790773506846-15o971.png">    </p:cNvPr>
+          <p:cNvPr id="7" name="Image 0" descr="/tmp/h2p-svg-1790971020312-sh1bor.png">    </p:cNvPr>
           <p:cNvPicPr>
             <a:picLocks noChangeAspect="1"/>
           </p:cNvPicPr>
@@ -23106,7 +23106,7 @@
       </p:sp>
       <p:pic>
         <p:nvPicPr>
-          <p:cNvPr id="14" name="Image 1" descr="/tmp/h2p-svg-1790773506847-pc8d4m.png">    </p:cNvPr>
+          <p:cNvPr id="14" name="Image 1" descr="/tmp/h2p-svg-1790971020313-pt0oup.png">    </p:cNvPr>
           <p:cNvPicPr>
             <a:picLocks noChangeAspect="1"/>
           </p:cNvPicPr>
@@ -23352,7 +23352,7 @@
       </p:sp>
       <p:pic>
         <p:nvPicPr>
-          <p:cNvPr id="21" name="Image 2" descr="/tmp/h2p-svg-1790773506847-14joep.png">    </p:cNvPr>
+          <p:cNvPr id="21" name="Image 2" descr="/tmp/h2p-svg-1790971020313-h905y1.png">    </p:cNvPr>
           <p:cNvPicPr>
             <a:picLocks noChangeAspect="1"/>
           </p:cNvPicPr>
@@ -23449,7 +23449,7 @@
                 <a:ea typeface="Liberation Sans Narrow" pitchFamily="34" charset="-122"/>
                 <a:cs typeface="Liberation Sans Narrow" pitchFamily="34" charset="-120"/>
               </a:rPr>
-              <a:t>youtu.be/W82roIETJJ8</a:t>
+              <a:t>youtu.be/h1Fh6I6Yxac</a:t>
             </a:r>
             <a:endParaRPr lang="en-US" sz="800" dirty="0"/>
           </a:p>
@@ -25005,7 +25005,7 @@
       </p:sp>
       <p:pic>
         <p:nvPicPr>
-          <p:cNvPr id="36" name="Image 0" descr="/tmp/h2p-svg-1790773507495-wz2yl7.png">    </p:cNvPr>
+          <p:cNvPr id="36" name="Image 0" descr="/tmp/h2p-svg-1790971020991-57d6q9.png">    </p:cNvPr>
           <p:cNvPicPr>
             <a:picLocks noChangeAspect="1"/>
           </p:cNvPicPr>
@@ -25196,7 +25196,7 @@
       </p:sp>
       <p:pic>
         <p:nvPicPr>
-          <p:cNvPr id="41" name="Image 1" descr="/tmp/h2p-svg-1790773507495-u0njrb.png">    </p:cNvPr>
+          <p:cNvPr id="41" name="Image 1" descr="/tmp/h2p-svg-1790971020992-zzj81m.png">    </p:cNvPr>
           <p:cNvPicPr>
             <a:picLocks noChangeAspect="1"/>
           </p:cNvPicPr>
@@ -25259,7 +25259,7 @@
       </p:sp>
       <p:pic>
         <p:nvPicPr>
-          <p:cNvPr id="43" name="Image 2" descr="/tmp/h2p-svg-1790773507495-1mdokr.png">    </p:cNvPr>
+          <p:cNvPr id="43" name="Image 2" descr="/tmp/h2p-svg-1790971020992-710e7t.png">    </p:cNvPr>
           <p:cNvPicPr>
             <a:picLocks noChangeAspect="1"/>
           </p:cNvPicPr>
@@ -25322,7 +25322,7 @@
       </p:sp>
       <p:pic>
         <p:nvPicPr>
-          <p:cNvPr id="45" name="Image 3" descr="/tmp/h2p-svg-1790773507495-7o0ouh.png">    </p:cNvPr>
+          <p:cNvPr id="45" name="Image 3" descr="/tmp/h2p-svg-1790971020992-k9zu4m.png">    </p:cNvPr>
           <p:cNvPicPr>
             <a:picLocks noChangeAspect="1"/>
           </p:cNvPicPr>
@@ -26647,7 +26647,7 @@
       </p:sp>
       <p:pic>
         <p:nvPicPr>
-          <p:cNvPr id="5" name="Image 0" descr="/tmp/h2p-svg-1790773507490-e9mv8m.png">    </p:cNvPr>
+          <p:cNvPr id="5" name="Image 0" descr="/tmp/h2p-svg-1790971020966-4hamld.png">    </p:cNvPr>
           <p:cNvPicPr>
             <a:picLocks noChangeAspect="1"/>
           </p:cNvPicPr>
@@ -28335,7 +28335,7 @@
       </p:sp>
       <p:pic>
         <p:nvPicPr>
-          <p:cNvPr id="9" name="Image 0" descr="/tmp/h2p-svg-1790773507491-rc1xn8.png">    </p:cNvPr>
+          <p:cNvPr id="9" name="Image 0" descr="/tmp/h2p-svg-1790971020963-kulo65.png">    </p:cNvPr>
           <p:cNvPicPr>
             <a:picLocks noChangeAspect="1"/>
           </p:cNvPicPr>
@@ -28529,7 +28529,7 @@
       </p:sp>
       <p:pic>
         <p:nvPicPr>
-          <p:cNvPr id="14" name="Image 1" descr="/tmp/h2p-svg-1790773507491-ns79cf.png">    </p:cNvPr>
+          <p:cNvPr id="14" name="Image 1" descr="/tmp/h2p-svg-1790971020963-vm886x.png">    </p:cNvPr>
           <p:cNvPicPr>
             <a:picLocks noChangeAspect="1"/>
           </p:cNvPicPr>
@@ -28723,7 +28723,7 @@
       </p:sp>
       <p:pic>
         <p:nvPicPr>
-          <p:cNvPr id="19" name="Image 2" descr="/tmp/h2p-svg-1790773507491-fg8j9t.png">    </p:cNvPr>
+          <p:cNvPr id="19" name="Image 2" descr="/tmp/h2p-svg-1790971020963-sa6eui.png">    </p:cNvPr>
           <p:cNvPicPr>
             <a:picLocks noChangeAspect="1"/>
           </p:cNvPicPr>
@@ -28917,7 +28917,7 @@
       </p:sp>
       <p:pic>
         <p:nvPicPr>
-          <p:cNvPr id="24" name="Image 3" descr="/tmp/h2p-svg-1790773507491-ikkeww.png">    </p:cNvPr>
+          <p:cNvPr id="24" name="Image 3" descr="/tmp/h2p-svg-1790971020963-l6y2ki.png">    </p:cNvPr>
           <p:cNvPicPr>
             <a:picLocks noChangeAspect="1"/>
           </p:cNvPicPr>
@@ -29185,7 +29185,7 @@
       </p:sp>
       <p:pic>
         <p:nvPicPr>
-          <p:cNvPr id="31" name="Image 4" descr="/tmp/h2p-svg-1790773507491-kn08db.png">    </p:cNvPr>
+          <p:cNvPr id="31" name="Image 4" descr="/tmp/h2p-svg-1790971020963-ld0m1t.png">    </p:cNvPr>
           <p:cNvPicPr>
             <a:picLocks noChangeAspect="1"/>
           </p:cNvPicPr>
@@ -30627,7 +30627,7 @@
       </p:sp>
       <p:pic>
         <p:nvPicPr>
-          <p:cNvPr id="33" name="Image 0" descr="/tmp/h2p-svg-1790773507520-ujswzp.png">    </p:cNvPr>
+          <p:cNvPr id="33" name="Image 0" descr="/tmp/h2p-svg-1790971020974-he7aj0.png">    </p:cNvPr>
           <p:cNvPicPr>
             <a:picLocks noChangeAspect="1"/>
           </p:cNvPicPr>
